--- a/artifacts/speaking-portfolio-expanded/decks/free-tier-30min-screen.pptx
+++ b/artifacts/speaking-portfolio-expanded/decks/free-tier-30min-screen.pptx
@@ -104,7 +104,7 @@
                 <a:ea typeface="Arial"/>
                 <a:cs typeface="Arial"/>
               </a:rPr>
-              <a:t xml:space="preserve">Cry Me a Free Tier</a:t>
+              <a:t xml:space="preserve">Buy Me a Free Tier</a:t>
             </a:r>
             <a:endParaRPr lang="en-US" sz="1200"/>
           </a:p>
@@ -585,7 +585,7 @@
                 <a:ea typeface="Arial"/>
                 <a:cs typeface="Arial"/>
               </a:rPr>
-              <a:t xml:space="preserve">Cry Me a Free Tier</a:t>
+              <a:t xml:space="preserve">Buy Me a Free Tier</a:t>
             </a:r>
             <a:endParaRPr lang="en-US" sz="1200"/>
           </a:p>
@@ -953,7 +953,7 @@
                 <a:ea typeface="Arial"/>
                 <a:cs typeface="Arial"/>
               </a:rPr>
-              <a:t xml:space="preserve">So stop thinking of this as shopping, where the customer holds the power because they can leave. You are contracting, with a much better capitalized counterparty, and your architecture is the collateral. That reframe is the whole talk, and everything on the next three slides is just a way of reducing specificity or pricing the exposure.</a:t>
+              <a:t xml:space="preserve">So stop thinking of this as shopping, where the customer holds the power because they can leave. You are contracting, with a much better capitalized counterparty, and your architecture is the collateral. That reframe is the whole talk, and everything after this is just a way of reducing specificity or pricing the exposure.</a:t>
             </a:r>
             <a:endParaRPr lang="en-US" sz="1200"/>
           </a:p>
@@ -1158,7 +1158,7 @@
                 <a:ea typeface="Arial"/>
                 <a:cs typeface="Arial"/>
               </a:rPr>
-              <a:t xml:space="preserve">Cry Me a Free Tier</a:t>
+              <a:t xml:space="preserve">Buy Me a Free Tier</a:t>
             </a:r>
             <a:endParaRPr lang="en-US" sz="1200"/>
           </a:p>
@@ -1639,7 +1639,7 @@
                 <a:ea typeface="Arial"/>
                 <a:cs typeface="Arial"/>
               </a:rPr>
-              <a:t xml:space="preserve">Cry Me a Free Tier</a:t>
+              <a:t xml:space="preserve">Buy Me a Free Tier</a:t>
             </a:r>
             <a:endParaRPr lang="en-US" sz="1200"/>
           </a:p>
@@ -2007,99 +2007,99 @@
                 <a:ea typeface="Arial"/>
                 <a:cs typeface="Arial"/>
               </a:rPr>
-              <a:t xml:space="preserve">Cheap intelligence changes incentives before it changes organizations. Leave the table up.</a:t>
-            </a:r>
-            <a:endParaRPr lang="en-US" sz="1200"/>
-          </a:p>
-          <a:p>
-            <a:pPr marL="0" indent="0">
-              <a:lnSpc>
-                <a:spcPts val="1560"/>
-              </a:lnSpc>
-              <a:spcAft>
-                <a:spcPts val="0"/>
-              </a:spcAft>
-              <a:buNone/>
-            </a:pPr>
-            <a:r>
-              <a:rPr lang="en-US" sz="1200" b="0">
-                <a:solidFill>
-                  <a:srgbClr val="202b33"/>
-                </a:solidFill>
-                <a:latin typeface="Arial"/>
-                <a:ea typeface="Arial"/>
-                <a:cs typeface="Arial"/>
-              </a:rPr>
-              <a:t xml:space="preserve"/>
-            </a:r>
-            <a:endParaRPr lang="en-US" sz="1200"/>
-          </a:p>
-          <a:p>
-            <a:pPr marL="0" indent="0">
-              <a:lnSpc>
-                <a:spcPts val="1560"/>
-              </a:lnSpc>
-              <a:spcAft>
-                <a:spcPts val="0"/>
-              </a:spcAft>
-              <a:buNone/>
-            </a:pPr>
-            <a:r>
-              <a:rPr lang="en-US" sz="1200" b="0">
-                <a:solidFill>
-                  <a:srgbClr val="202b33"/>
-                </a:solidFill>
-                <a:latin typeface="Arial"/>
-                <a:ea typeface="Arial"/>
-                <a:cs typeface="Arial"/>
-              </a:rPr>
-              <a:t xml:space="preserve"/>
-            </a:r>
-            <a:endParaRPr lang="en-US" sz="1200"/>
-          </a:p>
-          <a:p>
-            <a:pPr marL="0" indent="0">
-              <a:lnSpc>
-                <a:spcPts val="1560"/>
-              </a:lnSpc>
-              <a:spcAft>
-                <a:spcPts val="0"/>
-              </a:spcAft>
-              <a:buNone/>
-            </a:pPr>
-            <a:r>
-              <a:rPr lang="en-US" sz="1200" b="0">
-                <a:solidFill>
-                  <a:srgbClr val="202b33"/>
-                </a:solidFill>
-                <a:latin typeface="Arial"/>
-                <a:ea typeface="Arial"/>
-                <a:cs typeface="Arial"/>
-              </a:rPr>
-              <a:t xml:space="preserve"/>
-            </a:r>
-            <a:endParaRPr lang="en-US" sz="1200"/>
-          </a:p>
-          <a:p>
-            <a:pPr marL="0" indent="0">
-              <a:lnSpc>
-                <a:spcPts val="1560"/>
-              </a:lnSpc>
-              <a:spcAft>
-                <a:spcPts val="0"/>
-              </a:spcAft>
-              <a:buNone/>
-            </a:pPr>
-            <a:r>
-              <a:rPr lang="en-US" sz="1200" b="0">
-                <a:solidFill>
-                  <a:srgbClr val="202b33"/>
-                </a:solidFill>
-                <a:latin typeface="Arial"/>
-                <a:ea typeface="Arial"/>
-                <a:cs typeface="Arial"/>
-              </a:rPr>
-              <a:t xml:space="preserve">Say the last line slowly. Leave the sweep table on screen for questions.</a:t>
+              <a:t xml:space="preserve">Cheap intelligence changes incentives before it changes organizations.</a:t>
+            </a:r>
+            <a:endParaRPr lang="en-US" sz="1200"/>
+          </a:p>
+          <a:p>
+            <a:pPr marL="0" indent="0">
+              <a:lnSpc>
+                <a:spcPts val="1560"/>
+              </a:lnSpc>
+              <a:spcAft>
+                <a:spcPts val="0"/>
+              </a:spcAft>
+              <a:buNone/>
+            </a:pPr>
+            <a:r>
+              <a:rPr lang="en-US" sz="1200" b="0">
+                <a:solidFill>
+                  <a:srgbClr val="202b33"/>
+                </a:solidFill>
+                <a:latin typeface="Arial"/>
+                <a:ea typeface="Arial"/>
+                <a:cs typeface="Arial"/>
+              </a:rPr>
+              <a:t xml:space="preserve"/>
+            </a:r>
+            <a:endParaRPr lang="en-US" sz="1200"/>
+          </a:p>
+          <a:p>
+            <a:pPr marL="0" indent="0">
+              <a:lnSpc>
+                <a:spcPts val="1560"/>
+              </a:lnSpc>
+              <a:spcAft>
+                <a:spcPts val="0"/>
+              </a:spcAft>
+              <a:buNone/>
+            </a:pPr>
+            <a:r>
+              <a:rPr lang="en-US" sz="1200" b="0">
+                <a:solidFill>
+                  <a:srgbClr val="202b33"/>
+                </a:solidFill>
+                <a:latin typeface="Arial"/>
+                <a:ea typeface="Arial"/>
+                <a:cs typeface="Arial"/>
+              </a:rPr>
+              <a:t xml:space="preserve"/>
+            </a:r>
+            <a:endParaRPr lang="en-US" sz="1200"/>
+          </a:p>
+          <a:p>
+            <a:pPr marL="0" indent="0">
+              <a:lnSpc>
+                <a:spcPts val="1560"/>
+              </a:lnSpc>
+              <a:spcAft>
+                <a:spcPts val="0"/>
+              </a:spcAft>
+              <a:buNone/>
+            </a:pPr>
+            <a:r>
+              <a:rPr lang="en-US" sz="1200" b="0">
+                <a:solidFill>
+                  <a:srgbClr val="202b33"/>
+                </a:solidFill>
+                <a:latin typeface="Arial"/>
+                <a:ea typeface="Arial"/>
+                <a:cs typeface="Arial"/>
+              </a:rPr>
+              <a:t xml:space="preserve"/>
+            </a:r>
+            <a:endParaRPr lang="en-US" sz="1200"/>
+          </a:p>
+          <a:p>
+            <a:pPr marL="0" indent="0">
+              <a:lnSpc>
+                <a:spcPts val="1560"/>
+              </a:lnSpc>
+              <a:spcAft>
+                <a:spcPts val="0"/>
+              </a:spcAft>
+              <a:buNone/>
+            </a:pPr>
+            <a:r>
+              <a:rPr lang="en-US" sz="1200" b="0">
+                <a:solidFill>
+                  <a:srgbClr val="202b33"/>
+                </a:solidFill>
+                <a:latin typeface="Arial"/>
+                <a:ea typeface="Arial"/>
+                <a:cs typeface="Arial"/>
+              </a:rPr>
+              <a:t xml:space="preserve">Say the last line slowly, then stop talking. For questions, jump back to the sweep table if this route kept slide 11.</a:t>
             </a:r>
             <a:endParaRPr lang="en-US" sz="1200"/>
           </a:p>
@@ -2212,7 +2212,7 @@
                 <a:ea typeface="Arial"/>
                 <a:cs typeface="Arial"/>
               </a:rPr>
-              <a:t xml:space="preserve">Cry Me a Free Tier</a:t>
+              <a:t xml:space="preserve">Buy Me a Free Tier</a:t>
             </a:r>
             <a:endParaRPr lang="en-US" sz="1200"/>
           </a:p>
@@ -2693,7 +2693,7 @@
                 <a:ea typeface="Arial"/>
                 <a:cs typeface="Arial"/>
               </a:rPr>
-              <a:t xml:space="preserve">Cry Me a Free Tier</a:t>
+              <a:t xml:space="preserve">Buy Me a Free Tier</a:t>
             </a:r>
             <a:endParaRPr lang="en-US" sz="1200"/>
           </a:p>
@@ -3266,7 +3266,7 @@
                 <a:ea typeface="Arial"/>
                 <a:cs typeface="Arial"/>
               </a:rPr>
-              <a:t xml:space="preserve">Cry Me a Free Tier</a:t>
+              <a:t xml:space="preserve">Buy Me a Free Tier</a:t>
             </a:r>
             <a:endParaRPr lang="en-US" sz="1200"/>
           </a:p>
@@ -3839,7 +3839,7 @@
                 <a:ea typeface="Arial"/>
                 <a:cs typeface="Arial"/>
               </a:rPr>
-              <a:t xml:space="preserve">Cry Me a Free Tier</a:t>
+              <a:t xml:space="preserve">Buy Me a Free Tier</a:t>
             </a:r>
             <a:endParaRPr lang="en-US" sz="1200"/>
           </a:p>
@@ -4458,7 +4458,7 @@
                 <a:ea typeface="Arial"/>
                 <a:cs typeface="Arial"/>
               </a:rPr>
-              <a:t xml:space="preserve">Cry Me a Free Tier</a:t>
+              <a:t xml:space="preserve">Buy Me a Free Tier</a:t>
             </a:r>
             <a:endParaRPr lang="en-US" sz="1200"/>
           </a:p>
@@ -4985,7 +4985,7 @@
                 <a:ea typeface="Arial"/>
                 <a:cs typeface="Arial"/>
               </a:rPr>
-              <a:t xml:space="preserve">Cry Me a Free Tier</a:t>
+              <a:t xml:space="preserve">Buy Me a Free Tier</a:t>
             </a:r>
             <a:endParaRPr lang="en-US" sz="1200"/>
           </a:p>
@@ -5558,7 +5558,7 @@
                 <a:ea typeface="Arial"/>
                 <a:cs typeface="Arial"/>
               </a:rPr>
-              <a:t xml:space="preserve">Cry Me a Free Tier</a:t>
+              <a:t xml:space="preserve">Buy Me a Free Tier</a:t>
             </a:r>
             <a:endParaRPr lang="en-US" sz="1200"/>
           </a:p>
@@ -6085,7 +6085,7 @@
                 <a:ea typeface="Arial"/>
                 <a:cs typeface="Arial"/>
               </a:rPr>
-              <a:t xml:space="preserve">Cry Me a Free Tier</a:t>
+              <a:t xml:space="preserve">Buy Me a Free Tier</a:t>
             </a:r>
             <a:endParaRPr lang="en-US" sz="1200"/>
           </a:p>
@@ -6177,7 +6177,7 @@
                 <a:ea typeface="Arial"/>
                 <a:cs typeface="Arial"/>
               </a:rPr>
-              <a:t xml:space="preserve">Sensitivity, not prediction. Quality is held fixed, which is itself an assumption.</a:t>
+              <a:t xml:space="preserve">Sensitivity, not prediction.</a:t>
             </a:r>
             <a:endParaRPr lang="en-US" sz="1200"/>
           </a:p>
@@ -6591,7 +6591,7 @@
                 <a:ea typeface="Arial"/>
                 <a:cs typeface="Arial"/>
               </a:rPr>
-              <a:t xml:space="preserve">Cry Me a Free Tier · Dan Levy</a:t>
+              <a:t xml:space="preserve">Buy Me a Free Tier · Dan Levy</a:t>
             </a:r>
             <a:endParaRPr lang="en-US" sz="1350"/>
           </a:p>
@@ -6908,7 +6908,7 @@
                 <a:ea typeface="Arial"/>
                 <a:cs typeface="Arial"/>
               </a:rPr>
-              <a:t xml:space="preserve">Cry Me a Free Tier</a:t>
+              <a:t xml:space="preserve">Buy Me a Free Tier</a:t>
             </a:r>
             <a:endParaRPr lang="en-US" sz="975"/>
           </a:p>
@@ -7477,7 +7477,7 @@
                 <a:ea typeface="Arial"/>
                 <a:cs typeface="Arial"/>
               </a:rPr>
-              <a:t xml:space="preserve">Cry Me a Free Tier</a:t>
+              <a:t xml:space="preserve">Buy Me a Free Tier</a:t>
             </a:r>
             <a:endParaRPr lang="en-US" sz="975"/>
           </a:p>
@@ -8046,7 +8046,7 @@
                 <a:ea typeface="Arial"/>
                 <a:cs typeface="Arial"/>
               </a:rPr>
-              <a:t xml:space="preserve">Cry Me a Free Tier</a:t>
+              <a:t xml:space="preserve">Buy Me a Free Tier</a:t>
             </a:r>
             <a:endParaRPr lang="en-US" sz="975"/>
           </a:p>
@@ -8615,7 +8615,7 @@
                 <a:ea typeface="Arial"/>
                 <a:cs typeface="Arial"/>
               </a:rPr>
-              <a:t xml:space="preserve">Cry Me a Free Tier</a:t>
+              <a:t xml:space="preserve">Buy Me a Free Tier</a:t>
             </a:r>
             <a:endParaRPr lang="en-US" sz="975"/>
           </a:p>
@@ -8795,30 +8795,7 @@
                 <a:ea typeface="Arial"/>
                 <a:cs typeface="Arial"/>
               </a:rPr>
-              <a:t xml:space="preserve">Price, cost, and value are three different</a:t>
-            </a:r>
-            <a:endParaRPr lang="en-US" sz="3900"/>
-          </a:p>
-          <a:p>
-            <a:pPr marL="0" indent="0">
-              <a:lnSpc>
-                <a:spcPts val="4680"/>
-              </a:lnSpc>
-              <a:spcAft>
-                <a:spcPts val="0"/>
-              </a:spcAft>
-              <a:buNone/>
-            </a:pPr>
-            <a:r>
-              <a:rPr lang="en-US" sz="3900" b="1">
-                <a:solidFill>
-                  <a:srgbClr val="F5F1E9"/>
-                </a:solidFill>
-                <a:latin typeface="Arial"/>
-                <a:ea typeface="Arial"/>
-                <a:cs typeface="Arial"/>
-              </a:rPr>
-              <a:t xml:space="preserve">numbers</a:t>
+              <a:t xml:space="preserve">Four boxes, one invoice</a:t>
             </a:r>
             <a:endParaRPr lang="en-US" sz="3900"/>
           </a:p>
@@ -9109,7 +9086,7 @@
                 <a:ea typeface="Arial"/>
                 <a:cs typeface="Arial"/>
               </a:rPr>
-              <a:t xml:space="preserve">Cry Me a Free Tier</a:t>
+              <a:t xml:space="preserve">Buy Me a Free Tier</a:t>
             </a:r>
             <a:endParaRPr lang="en-US" sz="975"/>
           </a:p>
@@ -9580,7 +9557,7 @@
                 <a:ea typeface="Arial"/>
                 <a:cs typeface="Arial"/>
               </a:rPr>
-              <a:t xml:space="preserve">Cry Me a Free Tier</a:t>
+              <a:t xml:space="preserve">Buy Me a Free Tier</a:t>
             </a:r>
             <a:endParaRPr lang="en-US" sz="975"/>
           </a:p>
@@ -10103,7 +10080,7 @@
                 <a:ea typeface="Arial"/>
                 <a:cs typeface="Arial"/>
               </a:rPr>
-              <a:t xml:space="preserve">Cry Me a Free Tier</a:t>
+              <a:t xml:space="preserve">Buy Me a Free Tier</a:t>
             </a:r>
             <a:endParaRPr lang="en-US" sz="975"/>
           </a:p>
@@ -10649,7 +10626,7 @@
                 <a:ea typeface="Arial"/>
                 <a:cs typeface="Arial"/>
               </a:rPr>
-              <a:t xml:space="preserve">Cry Me a Free Tier</a:t>
+              <a:t xml:space="preserve">Buy Me a Free Tier</a:t>
             </a:r>
             <a:endParaRPr lang="en-US" sz="975"/>
           </a:p>
@@ -11293,7 +11270,7 @@
                 <a:ea typeface="Arial"/>
                 <a:cs typeface="Arial"/>
               </a:rPr>
-              <a:t xml:space="preserve">Cry Me a Free Tier</a:t>
+              <a:t xml:space="preserve">Buy Me a Free Tier</a:t>
             </a:r>
             <a:endParaRPr lang="en-US" sz="975"/>
           </a:p>
@@ -11839,7 +11816,7 @@
                 <a:ea typeface="Arial"/>
                 <a:cs typeface="Arial"/>
               </a:rPr>
-              <a:t xml:space="preserve">Cry Me a Free Tier</a:t>
+              <a:t xml:space="preserve">Buy Me a Free Tier</a:t>
             </a:r>
             <a:endParaRPr lang="en-US" sz="975"/>
           </a:p>
@@ -12019,7 +11996,7 @@
                 <a:ea typeface="Arial"/>
                 <a:cs typeface="Arial"/>
               </a:rPr>
-              <a:t xml:space="preserve">Your acceptance rate is a price multiplier</a:t>
+              <a:t xml:space="preserve">Doubling on a Tuesday</a:t>
             </a:r>
             <a:endParaRPr lang="en-US" sz="3900"/>
           </a:p>
@@ -12431,7 +12408,7 @@
                 <a:ea typeface="Arial"/>
                 <a:cs typeface="Arial"/>
               </a:rPr>
-              <a:t xml:space="preserve">Cry Me a Free Tier</a:t>
+              <a:t xml:space="preserve">Buy Me a Free Tier</a:t>
             </a:r>
             <a:endParaRPr lang="en-US" sz="975"/>
           </a:p>
@@ -12611,30 +12588,7 @@
                 <a:ea typeface="Arial"/>
                 <a:cs typeface="Arial"/>
               </a:rPr>
-              <a:t xml:space="preserve">Demo: change one assumption, watch the unit</a:t>
-            </a:r>
-            <a:endParaRPr lang="en-US" sz="3900"/>
-          </a:p>
-          <a:p>
-            <a:pPr marL="0" indent="0">
-              <a:lnSpc>
-                <a:spcPts val="4680"/>
-              </a:lnSpc>
-              <a:spcAft>
-                <a:spcPts val="0"/>
-              </a:spcAft>
-              <a:buNone/>
-            </a:pPr>
-            <a:r>
-              <a:rPr lang="en-US" sz="3900" b="1">
-                <a:solidFill>
-                  <a:srgbClr val="F5F1E9"/>
-                </a:solidFill>
-                <a:latin typeface="Arial"/>
-                <a:ea typeface="Arial"/>
-                <a:cs typeface="Arial"/>
-              </a:rPr>
-              <a:t xml:space="preserve">cost</a:t>
+              <a:t xml:space="preserve">Turn the dial</a:t>
             </a:r>
             <a:endParaRPr lang="en-US" sz="3900"/>
           </a:p>
@@ -13271,7 +13225,7 @@
                 <a:ea typeface="Arial"/>
                 <a:cs typeface="Arial"/>
               </a:rPr>
-              <a:t xml:space="preserve">Sensitivity, not prediction. Quality is held fixed, which is itself an assumption.</a:t>
+              <a:t xml:space="preserve">Sensitivity, not prediction.</a:t>
             </a:r>
             <a:endParaRPr lang="en-US" sz="2025"/>
           </a:p>
@@ -13343,7 +13297,7 @@
                 <a:ea typeface="Arial"/>
                 <a:cs typeface="Arial"/>
               </a:rPr>
-              <a:t xml:space="preserve">Cry Me a Free Tier</a:t>
+              <a:t xml:space="preserve">Buy Me a Free Tier</a:t>
             </a:r>
             <a:endParaRPr lang="en-US" sz="975"/>
           </a:p>

--- a/artifacts/speaking-portfolio-expanded/decks/free-tier-30min-screen.pptx
+++ b/artifacts/speaking-portfolio-expanded/decks/free-tier-30min-screen.pptx
@@ -631,7 +631,7 @@
                 <a:ea typeface="Arial"/>
                 <a:cs typeface="Arial"/>
               </a:rPr>
-              <a:t xml:space="preserve">Source slide 12. 23:00 to 26:00</a:t>
+              <a:t xml:space="preserve">Source slide 12. 22:00 to 25:00</a:t>
             </a:r>
             <a:endParaRPr lang="en-US" sz="1200"/>
           </a:p>
@@ -816,52 +816,6 @@
                 <a:cs typeface="Arial"/>
               </a:rPr>
               <a:t xml:space="preserve">This is the slide I would keep if you cut every other one. Oliver Williamson won a Nobel in 2009 for working out what happens when two parties make investments that only pay off inside their relationship. He called it asset specificity, and the trouble it produces is called hold-up.</a:t>
-            </a:r>
-            <a:endParaRPr lang="en-US" sz="1200"/>
-          </a:p>
-          <a:p>
-            <a:pPr marL="0" indent="0">
-              <a:lnSpc>
-                <a:spcPts val="1560"/>
-              </a:lnSpc>
-              <a:spcAft>
-                <a:spcPts val="0"/>
-              </a:spcAft>
-              <a:buNone/>
-            </a:pPr>
-            <a:r>
-              <a:rPr lang="en-US" sz="1200" b="0">
-                <a:solidFill>
-                  <a:srgbClr val="202b33"/>
-                </a:solidFill>
-                <a:latin typeface="Arial"/>
-                <a:ea typeface="Arial"/>
-                <a:cs typeface="Arial"/>
-              </a:rPr>
-              <a:t xml:space="preserve"/>
-            </a:r>
-            <a:endParaRPr lang="en-US" sz="1200"/>
-          </a:p>
-          <a:p>
-            <a:pPr marL="0" indent="0">
-              <a:lnSpc>
-                <a:spcPts val="1560"/>
-              </a:lnSpc>
-              <a:spcAft>
-                <a:spcPts val="0"/>
-              </a:spcAft>
-              <a:buNone/>
-            </a:pPr>
-            <a:r>
-              <a:rPr lang="en-US" sz="1200" b="0">
-                <a:solidFill>
-                  <a:srgbClr val="202b33"/>
-                </a:solidFill>
-                <a:latin typeface="Arial"/>
-                <a:ea typeface="Arial"/>
-                <a:cs typeface="Arial"/>
-              </a:rPr>
-              <a:t xml:space="preserve">The shape is always the same. You make an investment that is worth a great deal here and very little anywhere else. That surplus, the part that exists only because you are locked in, is a prize, and at renewal your counterparty can reach for it. Nobody has to be a villain. It is simply what the structure permits, and rational parties do it.</a:t>
             </a:r>
             <a:endParaRPr lang="en-US" sz="1200"/>
           </a:p>
@@ -1204,7 +1158,7 @@
                 <a:ea typeface="Arial"/>
                 <a:cs typeface="Arial"/>
               </a:rPr>
-              <a:t xml:space="preserve">Source slide 14. 26:00 to 28:30</a:t>
+              <a:t xml:space="preserve">Source slide 14. 25:00 to 27:30</a:t>
             </a:r>
             <a:endParaRPr lang="en-US" sz="1200"/>
           </a:p>
@@ -1685,7 +1639,7 @@
                 <a:ea typeface="Arial"/>
                 <a:cs typeface="Arial"/>
               </a:rPr>
-              <a:t xml:space="preserve">Source slide 15. 28:30 to 30:00</a:t>
+              <a:t xml:space="preserve">Source slide 15. 27:30 to 30:00</a:t>
             </a:r>
             <a:endParaRPr lang="en-US" sz="1200"/>
           </a:p>
@@ -1916,52 +1870,6 @@
                 <a:cs typeface="Arial"/>
               </a:rPr>
               <a:t xml:space="preserve">There are your eight words. Externality, because the cost moved rather than vanished. Induced demand and Jevons, because cheaper made you use more, not less. Path dependence, because the lots stay built. Moral hazard, because whoever chooses is not whoever pays. Credible commitment, because those contracts are moves in a game and not disclosures about it. Asset specificity, because your architecture is worth more here than anywhere else. And real option, because reversibility is something you buy, not something you feel.</a:t>
-            </a:r>
-            <a:endParaRPr lang="en-US" sz="1200"/>
-          </a:p>
-          <a:p>
-            <a:pPr marL="0" indent="0">
-              <a:lnSpc>
-                <a:spcPts val="1560"/>
-              </a:lnSpc>
-              <a:spcAft>
-                <a:spcPts val="0"/>
-              </a:spcAft>
-              <a:buNone/>
-            </a:pPr>
-            <a:r>
-              <a:rPr lang="en-US" sz="1200" b="0">
-                <a:solidFill>
-                  <a:srgbClr val="202b33"/>
-                </a:solidFill>
-                <a:latin typeface="Arial"/>
-                <a:ea typeface="Arial"/>
-                <a:cs typeface="Arial"/>
-              </a:rPr>
-              <a:t xml:space="preserve"/>
-            </a:r>
-            <a:endParaRPr lang="en-US" sz="1200"/>
-          </a:p>
-          <a:p>
-            <a:pPr marL="0" indent="0">
-              <a:lnSpc>
-                <a:spcPts val="1560"/>
-              </a:lnSpc>
-              <a:spcAft>
-                <a:spcPts val="0"/>
-              </a:spcAft>
-              <a:buNone/>
-            </a:pPr>
-            <a:r>
-              <a:rPr lang="en-US" sz="1200" b="0">
-                <a:solidFill>
-                  <a:srgbClr val="202b33"/>
-                </a:solidFill>
-                <a:latin typeface="Arial"/>
-                <a:ea typeface="Arial"/>
-                <a:cs typeface="Arial"/>
-              </a:rPr>
-              <a:t xml:space="preserve">Some low prices are temporary. Some are a preview of genuinely cheaper production. You do not have to know which. You have to measure outcomes and keep the big choices reversible either way.</a:t>
             </a:r>
             <a:endParaRPr lang="en-US" sz="1200"/>
           </a:p>
@@ -3199,7 +3107,7 @@
                 <a:ea typeface="Arial"/>
                 <a:cs typeface="Arial"/>
               </a:rPr>
-              <a:t xml:space="preserve">Bridge: the enormous compute commitments everyone quotes are credible commitments in Schelling's sense, moves in a war of attrition, not disclosures about cost.</a:t>
+              <a:t xml:space="preserve">Bridge: the enormous compute commitments everyone quotes are credible commitments in Schelling's sense, moves in a war of attrition, not disclosures about cost. And note who is not a player in that game. Somebody is buying your free tier, and it is not you. You are not a combatant. You are the terrain.</a:t>
             </a:r>
             <a:endParaRPr lang="en-US" sz="1200"/>
           </a:p>
@@ -4161,7 +4069,7 @@
                 <a:ea typeface="Arial"/>
                 <a:cs typeface="Arial"/>
               </a:rPr>
-              <a:t xml:space="preserve">So: your per-token price has fallen off a cliff over the last few years, and your bill went up. Everyone in this room has had that conversation with a CFO and lost it. You are not being gouged and you did not do anything wrong. Spend is price times consumption, and consumption is jobs times calls per job times tokens per call. Cheapness moved every term on the right. Epoch's data through 2025 shows the price of a fixed capability falling fast and very unevenly by task, which is real and worth knowing, and is also exactly the condition under which total spend rises.</a:t>
+              <a:t xml:space="preserve">Both things can be fine. A falling price and a growing bill coexist comfortably as long as customer value grows faster. That is the relationship to measure, and almost nobody measures it.</a:t>
             </a:r>
             <a:endParaRPr lang="en-US" sz="1200"/>
           </a:p>
@@ -4504,7 +4412,7 @@
                 <a:ea typeface="Arial"/>
                 <a:cs typeface="Arial"/>
               </a:rPr>
-              <a:t xml:space="preserve">Source slide 7. 11:30 to 14:30</a:t>
+              <a:t xml:space="preserve">Source slide 7. 11:30 to 14:00</a:t>
             </a:r>
             <a:endParaRPr lang="en-US" sz="1200"/>
           </a:p>
@@ -5031,7 +4939,7 @@
                 <a:ea typeface="Arial"/>
                 <a:cs typeface="Arial"/>
               </a:rPr>
-              <a:t xml:space="preserve">Source slide 9. 14:30 to 16:30</a:t>
+              <a:t xml:space="preserve">Source slide 9. 14:00 to 16:30</a:t>
             </a:r>
             <a:endParaRPr lang="en-US" sz="1200"/>
           </a:p>
@@ -6131,7 +6039,7 @@
                 <a:ea typeface="Arial"/>
                 <a:cs typeface="Arial"/>
               </a:rPr>
-              <a:t xml:space="preserve">Source slide 11. 19:00 to 23:00</a:t>
+              <a:t xml:space="preserve">Source slide 11. 19:00 to 22:00</a:t>
             </a:r>
             <a:endParaRPr lang="en-US" sz="1200"/>
           </a:p>

--- a/artifacts/speaking-portfolio-expanded/decks/free-tier-30min-screen.pptx
+++ b/artifacts/speaking-portfolio-expanded/decks/free-tier-30min-screen.pptx
@@ -5215,7 +5215,7 @@
                 <a:ea typeface="Arial"/>
                 <a:cs typeface="Arial"/>
               </a:rPr>
-              <a:t xml:space="preserve">And notice what Shoup actually recommended, because everyone gets this wrong. He never said ban parking. He said charge the right price for it, and give the money back to the neighborhood. Same here. The fix is not austerity and it is not a policy forbidding the model. It is putting the number in front of the person making the choice, at the moment they make it. Estimated cost per accepted outcome, in the design doc, next to the latency budget.</a:t>
+              <a:t xml:space="preserve">And notice what Shoup actually recommended, because everyone gets this wrong. He never said ban parking. He said charge the right price and give the money back to the neighborhood. Same here. The fix is not austerity or a policy forbidding the model. It is putting the number in front of the person choosing, at the moment they choose: estimated cost per accepted outcome, in the design doc, next to the latency budget.</a:t>
             </a:r>
             <a:endParaRPr lang="en-US" sz="1200"/>
           </a:p>
